--- a/For DBA/1. Установка из исходников/Postgres установка из исходников .pptx
+++ b/For DBA/1. Установка из исходников/Postgres установка из исходников .pptx
@@ -319,7 +319,7 @@
           <a:p>
             <a:fld id="{B4C71EC6-210F-42DE-9C53-41977AD35B3D}" type="datetimeFigureOut">
               <a:rPr lang="ru-RU" smtClean="0"/>
-              <a:t>06.09.2026</a:t>
+              <a:t>17.10.2026</a:t>
             </a:fld>
             <a:endParaRPr lang="ru-RU"/>
           </a:p>
@@ -484,7 +484,7 @@
           <a:p>
             <a:fld id="{B4C71EC6-210F-42DE-9C53-41977AD35B3D}" type="datetimeFigureOut">
               <a:rPr lang="ru-RU" smtClean="0"/>
-              <a:t>06.09.2026</a:t>
+              <a:t>17.10.2026</a:t>
             </a:fld>
             <a:endParaRPr lang="ru-RU"/>
           </a:p>
@@ -659,7 +659,7 @@
           <a:p>
             <a:fld id="{B4C71EC6-210F-42DE-9C53-41977AD35B3D}" type="datetimeFigureOut">
               <a:rPr lang="ru-RU" smtClean="0"/>
-              <a:t>06.09.2026</a:t>
+              <a:t>17.10.2026</a:t>
             </a:fld>
             <a:endParaRPr lang="ru-RU"/>
           </a:p>
@@ -824,7 +824,7 @@
           <a:p>
             <a:fld id="{B4C71EC6-210F-42DE-9C53-41977AD35B3D}" type="datetimeFigureOut">
               <a:rPr lang="ru-RU" smtClean="0"/>
-              <a:t>06.09.2026</a:t>
+              <a:t>17.10.2026</a:t>
             </a:fld>
             <a:endParaRPr lang="ru-RU"/>
           </a:p>
@@ -1065,7 +1065,7 @@
           <a:p>
             <a:fld id="{B4C71EC6-210F-42DE-9C53-41977AD35B3D}" type="datetimeFigureOut">
               <a:rPr lang="ru-RU" smtClean="0"/>
-              <a:t>06.09.2026</a:t>
+              <a:t>17.10.2026</a:t>
             </a:fld>
             <a:endParaRPr lang="ru-RU"/>
           </a:p>
@@ -1348,7 +1348,7 @@
           <a:p>
             <a:fld id="{B4C71EC6-210F-42DE-9C53-41977AD35B3D}" type="datetimeFigureOut">
               <a:rPr lang="ru-RU" smtClean="0"/>
-              <a:t>06.09.2026</a:t>
+              <a:t>17.10.2026</a:t>
             </a:fld>
             <a:endParaRPr lang="ru-RU"/>
           </a:p>
@@ -1765,7 +1765,7 @@
           <a:p>
             <a:fld id="{B4C71EC6-210F-42DE-9C53-41977AD35B3D}" type="datetimeFigureOut">
               <a:rPr lang="ru-RU" smtClean="0"/>
-              <a:t>06.09.2026</a:t>
+              <a:t>17.10.2026</a:t>
             </a:fld>
             <a:endParaRPr lang="ru-RU"/>
           </a:p>
@@ -1878,7 +1878,7 @@
           <a:p>
             <a:fld id="{B4C71EC6-210F-42DE-9C53-41977AD35B3D}" type="datetimeFigureOut">
               <a:rPr lang="ru-RU" smtClean="0"/>
-              <a:t>06.09.2026</a:t>
+              <a:t>17.10.2026</a:t>
             </a:fld>
             <a:endParaRPr lang="ru-RU"/>
           </a:p>
@@ -1968,7 +1968,7 @@
           <a:p>
             <a:fld id="{B4C71EC6-210F-42DE-9C53-41977AD35B3D}" type="datetimeFigureOut">
               <a:rPr lang="ru-RU" smtClean="0"/>
-              <a:t>06.09.2026</a:t>
+              <a:t>17.10.2026</a:t>
             </a:fld>
             <a:endParaRPr lang="ru-RU"/>
           </a:p>
@@ -2240,7 +2240,7 @@
           <a:p>
             <a:fld id="{B4C71EC6-210F-42DE-9C53-41977AD35B3D}" type="datetimeFigureOut">
               <a:rPr lang="ru-RU" smtClean="0"/>
-              <a:t>06.09.2026</a:t>
+              <a:t>17.10.2026</a:t>
             </a:fld>
             <a:endParaRPr lang="ru-RU"/>
           </a:p>
@@ -2488,7 +2488,7 @@
           <a:p>
             <a:fld id="{B4C71EC6-210F-42DE-9C53-41977AD35B3D}" type="datetimeFigureOut">
               <a:rPr lang="ru-RU" smtClean="0"/>
-              <a:t>06.09.2026</a:t>
+              <a:t>17.10.2026</a:t>
             </a:fld>
             <a:endParaRPr lang="ru-RU"/>
           </a:p>
@@ -2696,7 +2696,7 @@
           <a:p>
             <a:fld id="{B4C71EC6-210F-42DE-9C53-41977AD35B3D}" type="datetimeFigureOut">
               <a:rPr lang="ru-RU" smtClean="0"/>
-              <a:t>06.09.2026</a:t>
+              <a:t>17.10.2026</a:t>
             </a:fld>
             <a:endParaRPr lang="ru-RU"/>
           </a:p>
@@ -3082,18 +3082,50 @@
           <a:lstStyle/>
           <a:p>
             <a:r>
-              <a:rPr lang="en-US" dirty="0" err="1" smtClean="0"/>
+              <a:rPr lang="en-US" dirty="0" err="1" smtClean="0">
+                <a:effectLst>
+                  <a:outerShdw blurRad="38100" dist="38100" dir="2700000" algn="tl">
+                    <a:srgbClr val="000000">
+                      <a:alpha val="43137"/>
+                    </a:srgbClr>
+                  </a:outerShdw>
+                </a:effectLst>
+              </a:rPr>
               <a:t>Postgresql</a:t>
             </a:r>
             <a:r>
-              <a:rPr lang="en-US" dirty="0" smtClean="0"/>
+              <a:rPr lang="en-US" dirty="0" smtClean="0">
+                <a:effectLst>
+                  <a:outerShdw blurRad="38100" dist="38100" dir="2700000" algn="tl">
+                    <a:srgbClr val="000000">
+                      <a:alpha val="43137"/>
+                    </a:srgbClr>
+                  </a:outerShdw>
+                </a:effectLst>
+              </a:rPr>
               <a:t> </a:t>
             </a:r>
             <a:r>
-              <a:rPr lang="ru-RU" dirty="0" smtClean="0"/>
+              <a:rPr lang="ru-RU" dirty="0" smtClean="0">
+                <a:effectLst>
+                  <a:outerShdw blurRad="38100" dist="38100" dir="2700000" algn="tl">
+                    <a:srgbClr val="000000">
+                      <a:alpha val="43137"/>
+                    </a:srgbClr>
+                  </a:outerShdw>
+                </a:effectLst>
+              </a:rPr>
               <a:t>установка из исходников</a:t>
             </a:r>
-            <a:endParaRPr lang="ru-RU" dirty="0"/>
+            <a:endParaRPr lang="ru-RU" dirty="0">
+              <a:effectLst>
+                <a:outerShdw blurRad="38100" dist="38100" dir="2700000" algn="tl">
+                  <a:srgbClr val="000000">
+                    <a:alpha val="43137"/>
+                  </a:srgbClr>
+                </a:outerShdw>
+              </a:effectLst>
+            </a:endParaRPr>
           </a:p>
         </p:txBody>
       </p:sp>
@@ -3233,8 +3265,8 @@
         </p:blipFill>
         <p:spPr>
           <a:xfrm>
-            <a:off x="1115617" y="1412777"/>
-            <a:ext cx="6768752" cy="3859162"/>
+            <a:off x="736720" y="1114644"/>
+            <a:ext cx="7291663" cy="4157296"/>
           </a:xfrm>
         </p:spPr>
       </p:pic>
@@ -7737,7 +7769,7 @@
         <p:spPr>
           <a:xfrm>
             <a:off x="0" y="3356992"/>
-            <a:ext cx="9912374" cy="1391210"/>
+            <a:ext cx="9144000" cy="1283368"/>
           </a:xfrm>
         </p:spPr>
       </p:pic>
